--- a/Презентация_ВасильеваОВ.pptx
+++ b/Презентация_ВасильеваОВ.pptx
@@ -21885,7 +21885,7 @@
                 <a:cs typeface="Roboto Mono"/>
                 <a:sym typeface="Roboto Mono"/>
               </a:rPr>
-              <a:t>search_hybrid</a:t>
+              <a:t>find_relevant_docs</a:t>
             </a:r>
             <a:endParaRPr b="1" sz="1300">
               <a:solidFill>
